--- a/docs/proposals/EARTHUS_세지구_메뉴통합제안_20260903.pptx
+++ b/docs/proposals/EARTHUS_세지구_메뉴통합제안_20260903.pptx
@@ -600,7 +600,7 @@
           <a:p>
             <a:r>
               <a:rPr lang="en-US" dirty="0"/>
-              <a:t>1~3 은 코드 작업, 4~5 는 제품 결정이 먼저 필요합니다.</a:t>
+              <a:t>1~4 는 코드 작업입니다. 5 는 이름 문제라 제품 결정입니다.</a:t>
             </a:r>
             <a:endParaRPr lang="en-US" dirty="0"/>
           </a:p>
@@ -952,7 +952,7 @@
           <a:p>
             <a:r>
               <a:rPr lang="en-US" dirty="0"/>
-              <a:t>이 어긋남이 메뉴가 커질수록 비용이 됩니다. 축을 지키거나, 축을 바꾸거나 둘 중 하나입니다.</a:t>
+              <a:t>처음엔 시간축이 안 지켜진다고 봤는데 그게 아니었습니다. 예보는 기본 기능이라 v1 에 있는 것이 맞고, 경계는 자료를 어디까지 다루는가입니다.</a:t>
             </a:r>
             <a:endParaRPr lang="en-US" dirty="0"/>
           </a:p>
@@ -2616,7 +2616,7 @@
                 <a:ea typeface="Malgun Gothic" pitchFamily="34" charset="-122"/>
                 <a:cs typeface="Malgun Gothic" pitchFamily="34" charset="-120"/>
               </a:rPr>
-              <a:t>묻기를 하나로</a:t>
+              <a:t>실황을 한 벌로</a:t>
             </a:r>
             <a:endParaRPr lang="en-US" sz="1350" dirty="0"/>
           </a:p>
@@ -2655,7 +2655,7 @@
                 <a:ea typeface="Malgun Gothic" pitchFamily="34" charset="-122"/>
                 <a:cs typeface="Malgun Gothic" pitchFamily="34" charset="-120"/>
               </a:rPr>
-              <a:t>엔진 통합</a:t>
+              <a:t>중복 제거</a:t>
             </a:r>
             <a:endParaRPr lang="en-US" sz="1000" dirty="0"/>
           </a:p>
@@ -2694,7 +2694,7 @@
                 <a:ea typeface="Malgun Gothic" pitchFamily="34" charset="-122"/>
                 <a:cs typeface="Malgun Gothic" pitchFamily="34" charset="-120"/>
               </a:rPr>
-              <a:t>v1 라우터를 공용으로 올리고, v2 LLM 이 그 라우터를 부르게 한다. v1 주석이 예언한 구조 그대로.</a:t>
+              <a:t>구름·지진·바람·레이더·기입 모형을 공용 모듈로. 지금은 v1·v2 가 각자 구현하고 있다.</a:t>
             </a:r>
             <a:endParaRPr lang="en-US" sz="1150" dirty="0"/>
           </a:p>
@@ -2819,7 +2819,7 @@
                 <a:ea typeface="Malgun Gothic" pitchFamily="34" charset="-122"/>
                 <a:cs typeface="Malgun Gothic" pitchFamily="34" charset="-120"/>
               </a:rPr>
-              <a:t>진리등급 어휘 통일</a:t>
+              <a:t>묻기를 하나로</a:t>
             </a:r>
             <a:endParaRPr lang="en-US" sz="1350" dirty="0"/>
           </a:p>
@@ -2858,7 +2858,7 @@
                 <a:ea typeface="Malgun Gothic" pitchFamily="34" charset="-122"/>
                 <a:cs typeface="Malgun Gothic" pitchFamily="34" charset="-120"/>
               </a:rPr>
-              <a:t>표현 통일</a:t>
+              <a:t>엔진 통합</a:t>
             </a:r>
             <a:endParaRPr lang="en-US" sz="1000" dirty="0"/>
           </a:p>
@@ -2897,7 +2897,7 @@
                 <a:ea typeface="Malgun Gothic" pitchFamily="34" charset="-122"/>
                 <a:cs typeface="Malgun Gothic" pitchFamily="34" charset="-120"/>
               </a:rPr>
-              <a:t>v2 의 배지 어휘를 v1·v3 로. 같은 자료가 세 곳에서 같은 이름으로 불린다.</a:t>
+              <a:t>v1 라우터를 공용으로 올리고 v2 LLM 이 그것을 부르게 한다. v1 주석이 예언한 구조 그대로.</a:t>
             </a:r>
             <a:endParaRPr lang="en-US" sz="1150" dirty="0"/>
           </a:p>
@@ -3022,7 +3022,7 @@
                 <a:ea typeface="Malgun Gothic" pitchFamily="34" charset="-122"/>
                 <a:cs typeface="Malgun Gothic" pitchFamily="34" charset="-120"/>
               </a:rPr>
-              <a:t>공통 여섯의 문법 확정</a:t>
+              <a:t>진리등급 어휘 통일</a:t>
             </a:r>
             <a:endParaRPr lang="en-US" sz="1350" dirty="0"/>
           </a:p>
@@ -3061,7 +3061,7 @@
                 <a:ea typeface="Malgun Gothic" pitchFamily="34" charset="-122"/>
                 <a:cs typeface="Malgun Gothic" pitchFamily="34" charset="-120"/>
               </a:rPr>
-              <a:t>문법</a:t>
+              <a:t>표현 통일</a:t>
             </a:r>
             <a:endParaRPr lang="en-US" sz="1000" dirty="0"/>
           </a:p>
@@ -3100,7 +3100,7 @@
                 <a:ea typeface="Malgun Gothic" pitchFamily="34" charset="-122"/>
                 <a:cs typeface="Malgun Gothic" pitchFamily="34" charset="-120"/>
               </a:rPr>
-              <a:t>구름·비·기온·바람·지진·낙뢰를 세 문법으로 못박고 v3 를 그 기준으로 채운다.</a:t>
+              <a:t>v2 의 배지 어휘를 v1·v3 로. 같은 자료가 세 곳에서 같은 이름으로 불린다.</a:t>
             </a:r>
             <a:endParaRPr lang="en-US" sz="1150" dirty="0"/>
           </a:p>
@@ -3225,7 +3225,7 @@
                 <a:ea typeface="Malgun Gothic" pitchFamily="34" charset="-122"/>
                 <a:cs typeface="Malgun Gothic" pitchFamily="34" charset="-120"/>
               </a:rPr>
-              <a:t>메뉴를 «하려는 일» 로</a:t>
+              <a:t>공통 여섯의 문법 확정</a:t>
             </a:r>
             <a:endParaRPr lang="en-US" sz="1350" dirty="0"/>
           </a:p>
@@ -3264,7 +3264,7 @@
                 <a:ea typeface="Malgun Gothic" pitchFamily="34" charset="-122"/>
                 <a:cs typeface="Malgun Gothic" pitchFamily="34" charset="-120"/>
               </a:rPr>
-              <a:t>정보구조</a:t>
+              <a:t>문법</a:t>
             </a:r>
             <a:endParaRPr lang="en-US" sz="1000" dirty="0"/>
           </a:p>
@@ -3303,7 +3303,7 @@
                 <a:ea typeface="Malgun Gothic" pitchFamily="34" charset="-122"/>
                 <a:cs typeface="Malgun Gothic" pitchFamily="34" charset="-120"/>
               </a:rPr>
-              <a:t>자료 이름 대신 지금·안전·시간·근거로 다시 묶는다. 한국이 먼저.</a:t>
+              <a:t>구름·비·기온·바람·지진·낙뢰를 세 문법으로 못박고 v3 를 그 기준으로 채운다.</a:t>
             </a:r>
             <a:endParaRPr lang="en-US" sz="1150" dirty="0"/>
           </a:p>
@@ -3428,7 +3428,7 @@
                 <a:ea typeface="Malgun Gothic" pitchFamily="34" charset="-122"/>
                 <a:cs typeface="Malgun Gothic" pitchFamily="34" charset="-120"/>
               </a:rPr>
-              <a:t>축을 지키거나 바꾸거나</a:t>
+              <a:t>전환기 문구를 실제에 맞춘다</a:t>
             </a:r>
             <a:endParaRPr lang="en-US" sz="1350" dirty="0"/>
           </a:p>
@@ -3467,7 +3467,7 @@
                 <a:ea typeface="Malgun Gothic" pitchFamily="34" charset="-122"/>
                 <a:cs typeface="Malgun Gothic" pitchFamily="34" charset="-120"/>
               </a:rPr>
-              <a:t>결정 필요</a:t>
+              <a:t>문구</a:t>
             </a:r>
             <a:endParaRPr lang="en-US" sz="1000" dirty="0"/>
           </a:p>
@@ -3506,7 +3506,7 @@
                 <a:ea typeface="Malgun Gothic" pitchFamily="34" charset="-122"/>
                 <a:cs typeface="Malgun Gothic" pitchFamily="34" charset="-120"/>
               </a:rPr>
-              <a:t>현재/미래/과거를 지킬지, 지금·깊이·경이로 바꿀지 정한다. 이건 제품 결정.</a:t>
+              <a:t>현재/미래/과거 대신 기본 · 예측 · 경이. 축이 시간이 아니라 자료를 어디까지 다루는가이기 때문.</a:t>
             </a:r>
             <a:endParaRPr lang="en-US" sz="1150" dirty="0"/>
           </a:p>
@@ -4081,7 +4081,7 @@
                 <a:ea typeface="Malgun Gothic" pitchFamily="34" charset="-122"/>
                 <a:cs typeface="Malgun Gothic" pitchFamily="34" charset="-120"/>
               </a:rPr>
-              <a:t>생활과 안전의 지구</a:t>
+              <a:t>기본 서비스</a:t>
             </a:r>
             <a:endParaRPr lang="en-US" sz="1700" dirty="0"/>
           </a:p>
@@ -4127,7 +4127,7 @@
                 <a:ea typeface="Malgun Gothic" pitchFamily="34" charset="-122"/>
                 <a:cs typeface="Malgun Gothic" pitchFamily="34" charset="-120"/>
               </a:rPr>
-              <a:t>레이어 44개 · 10묶음</a:t>
+              <a:t>공공데이터를 받아 그대로 구현</a:t>
             </a:r>
             <a:endParaRPr lang="en-US" sz="1250" dirty="0"/>
           </a:p>
@@ -4151,7 +4151,7 @@
                 <a:ea typeface="Malgun Gothic" pitchFamily="34" charset="-122"/>
                 <a:cs typeface="Malgun Gothic" pitchFamily="34" charset="-120"/>
               </a:rPr>
-              <a:t>별도 화면 15개 (해양·연구·관측소…)</a:t>
+              <a:t>레이어 44개 · 보고서/검증 화면 7개</a:t>
             </a:r>
             <a:endParaRPr lang="en-US" sz="1250" dirty="0"/>
           </a:p>
@@ -4175,7 +4175,7 @@
                 <a:ea typeface="Malgun Gothic" pitchFamily="34" charset="-122"/>
                 <a:cs typeface="Malgun Gothic" pitchFamily="34" charset="-120"/>
               </a:rPr>
-              <a:t>계정·구독·관리자</a:t>
+              <a:t>예보는 기상의 기본 기능 — 여기 있다</a:t>
             </a:r>
             <a:endParaRPr lang="en-US" sz="1250" dirty="0"/>
           </a:p>
@@ -4339,7 +4339,7 @@
                 <a:ea typeface="Malgun Gothic" pitchFamily="34" charset="-122"/>
                 <a:cs typeface="Malgun Gothic" pitchFamily="34" charset="-120"/>
               </a:rPr>
-              <a:t>분석과 시간축의 지구</a:t>
+              <a:t>여기서 더 나아간다</a:t>
             </a:r>
             <a:endParaRPr lang="en-US" sz="1700" dirty="0"/>
           </a:p>
@@ -4409,7 +4409,7 @@
                 <a:ea typeface="Malgun Gothic" pitchFamily="34" charset="-122"/>
                 <a:cs typeface="Malgun Gothic" pitchFamily="34" charset="-120"/>
               </a:rPr>
-              <a:t>5일 예보 · 진리등급 배지</a:t>
+              <a:t>예측 — 시나리오 · 앙상블 · 2100 전망</a:t>
             </a:r>
             <a:endParaRPr lang="en-US" sz="1250" dirty="0"/>
           </a:p>
@@ -4433,7 +4433,7 @@
                 <a:ea typeface="Malgun Gothic" pitchFamily="34" charset="-122"/>
                 <a:cs typeface="Malgun Gothic" pitchFamily="34" charset="-120"/>
               </a:rPr>
-              <a:t>LLM 문답 · 3D 지형</a:t>
+              <a:t>진리등급 배지 · LLM 문답 · 3D 지형</a:t>
             </a:r>
             <a:endParaRPr lang="en-US" sz="1250" dirty="0"/>
           </a:p>
@@ -5911,7 +5911,7 @@
                 <a:ea typeface="Malgun Gothic" pitchFamily="34" charset="-122"/>
                 <a:cs typeface="Malgun Gothic" pitchFamily="34" charset="-120"/>
               </a:rPr>
-              <a:t>전환기는 시간축을 약속하는데, 내용이 지키지 않는다</a:t>
+              <a:t>축은 시간이 아니라 «자료를 어디까지 다루는가» 다</a:t>
             </a:r>
             <a:endParaRPr lang="en-US" sz="3200" dirty="0"/>
           </a:p>
@@ -5919,18 +5919,686 @@
       </p:sp>
       <p:sp>
         <p:nvSpPr>
-          <p:cNvPr id="4" name="Shape 2"/>
+          <p:cNvPr id="4" name="Text 2"/>
+          <p:cNvSpPr txBox="1"/>
+          <p:nvPr/>
+        </p:nvSpPr>
+        <p:spPr>
+          <a:xfrm>
+            <a:off x="566928" y="1444752"/>
+            <a:ext cx="11064240" cy="457200"/>
+          </a:xfrm>
+          <a:prstGeom prst="rect">
+            <a:avLst/>
+          </a:prstGeom>
+          <a:noFill/>
+          <a:ln/>
+        </p:spPr>
+        <p:txBody>
+          <a:bodyPr wrap="square" lIns="0" tIns="0" rIns="0" bIns="0" rtlCol="0" anchor="ctr"/>
+          <a:lstStyle/>
+          <a:p>
+            <a:pPr indent="0" marL="0">
+              <a:lnSpc>
+                <a:spcPts val="2100"/>
+              </a:lnSpc>
+              <a:buNone/>
+            </a:pPr>
+            <a:r>
+              <a:rPr lang="en-US" sz="1400" dirty="0">
+                <a:solidFill>
+                  <a:srgbClr val="9DB0C6"/>
+                </a:solidFill>
+                <a:latin typeface="Malgun Gothic" pitchFamily="34" charset="0"/>
+                <a:ea typeface="Malgun Gothic" pitchFamily="34" charset="-122"/>
+                <a:cs typeface="Malgun Gothic" pitchFamily="34" charset="-120"/>
+              </a:rPr>
+              <a:t>전환기 문구는 현재/미래/과거로 적혀 있지만, 실제 경계는 시간이 아닙니다.</a:t>
+            </a:r>
+            <a:endParaRPr lang="en-US" sz="1400" dirty="0"/>
+          </a:p>
+        </p:txBody>
+      </p:sp>
+      <p:sp>
+        <p:nvSpPr>
+          <p:cNvPr id="5" name="Shape 3"/>
           <p:cNvSpPr/>
           <p:nvPr/>
         </p:nvSpPr>
         <p:spPr>
           <a:xfrm>
-            <a:off x="548640" y="1965960"/>
-            <a:ext cx="11091672" cy="1371600"/>
+            <a:off x="548640" y="2057400"/>
+            <a:ext cx="3520440" cy="2057400"/>
           </a:xfrm>
           <a:prstGeom prst="roundRect">
             <a:avLst>
-              <a:gd name="adj" fmla="val 8000"/>
+              <a:gd name="adj" fmla="val 5333"/>
+            </a:avLst>
+          </a:prstGeom>
+          <a:solidFill>
+            <a:srgbClr val="141F33"/>
+          </a:solidFill>
+          <a:ln w="12700">
+            <a:solidFill>
+              <a:srgbClr val="2A3A55"/>
+            </a:solidFill>
+            <a:prstDash val="solid"/>
+          </a:ln>
+        </p:spPr>
+      </p:sp>
+      <p:sp>
+        <p:nvSpPr>
+          <p:cNvPr id="6" name="Shape 4"/>
+          <p:cNvSpPr/>
+          <p:nvPr/>
+        </p:nvSpPr>
+        <p:spPr>
+          <a:xfrm>
+            <a:off x="822960" y="2286000"/>
+            <a:ext cx="1417320" cy="292608"/>
+          </a:xfrm>
+          <a:prstGeom prst="roundRect">
+            <a:avLst>
+              <a:gd name="adj" fmla="val 50000"/>
+            </a:avLst>
+          </a:prstGeom>
+          <a:solidFill>
+            <a:srgbClr val="4A90D9"/>
+          </a:solidFill>
+          <a:ln/>
+        </p:spPr>
+      </p:sp>
+      <p:sp>
+        <p:nvSpPr>
+          <p:cNvPr id="7" name="Text 5"/>
+          <p:cNvSpPr txBox="1"/>
+          <p:nvPr/>
+        </p:nvSpPr>
+        <p:spPr>
+          <a:xfrm>
+            <a:off x="822960" y="2286000"/>
+            <a:ext cx="1417320" cy="292608"/>
+          </a:xfrm>
+          <a:prstGeom prst="rect">
+            <a:avLst/>
+          </a:prstGeom>
+          <a:noFill/>
+          <a:ln/>
+        </p:spPr>
+        <p:txBody>
+          <a:bodyPr wrap="square" lIns="0" tIns="0" rIns="0" bIns="0" rtlCol="0" anchor="ctr"/>
+          <a:lstStyle/>
+          <a:p>
+            <a:pPr algn="ctr" indent="0" marL="0">
+              <a:buNone/>
+            </a:pPr>
+            <a:r>
+              <a:rPr lang="en-US" sz="1100" b="1" dirty="0">
+                <a:solidFill>
+                  <a:srgbClr val="0B1220"/>
+                </a:solidFill>
+                <a:latin typeface="Malgun Gothic" pitchFamily="34" charset="0"/>
+                <a:ea typeface="Malgun Gothic" pitchFamily="34" charset="-122"/>
+                <a:cs typeface="Malgun Gothic" pitchFamily="34" charset="-120"/>
+              </a:rPr>
+              <a:t>v1 · 기본</a:t>
+            </a:r>
+            <a:endParaRPr lang="en-US" sz="1100" dirty="0"/>
+          </a:p>
+        </p:txBody>
+      </p:sp>
+      <p:sp>
+        <p:nvSpPr>
+          <p:cNvPr id="8" name="Text 6"/>
+          <p:cNvSpPr txBox="1"/>
+          <p:nvPr/>
+        </p:nvSpPr>
+        <p:spPr>
+          <a:xfrm>
+            <a:off x="822960" y="2697480"/>
+            <a:ext cx="3017520" cy="292608"/>
+          </a:xfrm>
+          <a:prstGeom prst="rect">
+            <a:avLst/>
+          </a:prstGeom>
+          <a:noFill/>
+          <a:ln/>
+        </p:spPr>
+        <p:txBody>
+          <a:bodyPr wrap="square" lIns="0" tIns="0" rIns="0" bIns="0" rtlCol="0" anchor="ctr"/>
+          <a:lstStyle/>
+          <a:p>
+            <a:pPr indent="0" marL="0">
+              <a:buNone/>
+            </a:pPr>
+            <a:r>
+              <a:rPr lang="en-US" sz="1350" b="1" dirty="0">
+                <a:solidFill>
+                  <a:srgbClr val="E8EEF6"/>
+                </a:solidFill>
+                <a:latin typeface="Malgun Gothic" pitchFamily="34" charset="0"/>
+                <a:ea typeface="Malgun Gothic" pitchFamily="34" charset="-122"/>
+                <a:cs typeface="Malgun Gothic" pitchFamily="34" charset="-120"/>
+              </a:rPr>
+              <a:t>받는다 · 보여준다 · 검증한다</a:t>
+            </a:r>
+            <a:endParaRPr lang="en-US" sz="1350" dirty="0"/>
+          </a:p>
+        </p:txBody>
+      </p:sp>
+      <p:sp>
+        <p:nvSpPr>
+          <p:cNvPr id="9" name="Text 7"/>
+          <p:cNvSpPr txBox="1"/>
+          <p:nvPr/>
+        </p:nvSpPr>
+        <p:spPr>
+          <a:xfrm>
+            <a:off x="822960" y="3035808"/>
+            <a:ext cx="3017520" cy="960120"/>
+          </a:xfrm>
+          <a:prstGeom prst="rect">
+            <a:avLst/>
+          </a:prstGeom>
+          <a:noFill/>
+          <a:ln/>
+        </p:spPr>
+        <p:txBody>
+          <a:bodyPr wrap="square" lIns="0" tIns="0" rIns="0" bIns="0" rtlCol="0" anchor="ctr"/>
+          <a:lstStyle/>
+          <a:p>
+            <a:pPr indent="0" marL="0">
+              <a:lnSpc>
+                <a:spcPts val="1500"/>
+              </a:lnSpc>
+              <a:buNone/>
+            </a:pPr>
+            <a:r>
+              <a:rPr lang="en-US" sz="1050" dirty="0">
+                <a:solidFill>
+                  <a:srgbClr val="9DB0C6"/>
+                </a:solidFill>
+                <a:latin typeface="Malgun Gothic" pitchFamily="34" charset="0"/>
+                <a:ea typeface="Malgun Gothic" pitchFamily="34" charset="-122"/>
+                <a:cs typeface="Malgun Gothic" pitchFamily="34" charset="-120"/>
+              </a:rPr>
+              <a:t>공공데이터를 그대로 구현하고 출처를 밝히고</a:t>
+            </a:r>
+            <a:endParaRPr lang="en-US" sz="1050" dirty="0"/>
+          </a:p>
+          <a:p>
+            <a:pPr indent="0" marL="0">
+              <a:lnSpc>
+                <a:spcPts val="1500"/>
+              </a:lnSpc>
+              <a:buNone/>
+            </a:pPr>
+            <a:r>
+              <a:rPr lang="en-US" sz="1050" dirty="0">
+                <a:solidFill>
+                  <a:srgbClr val="9DB0C6"/>
+                </a:solidFill>
+                <a:latin typeface="Malgun Gothic" pitchFamily="34" charset="0"/>
+                <a:ea typeface="Malgun Gothic" pitchFamily="34" charset="-122"/>
+                <a:cs typeface="Malgun Gothic" pitchFamily="34" charset="-120"/>
+              </a:rPr>
+              <a:t>맞았는지 확인해 보고서로 낸다.</a:t>
+            </a:r>
+            <a:endParaRPr lang="en-US" sz="1050" dirty="0"/>
+          </a:p>
+          <a:p>
+            <a:pPr indent="0" marL="0">
+              <a:lnSpc>
+                <a:spcPts val="1500"/>
+              </a:lnSpc>
+              <a:buNone/>
+            </a:pPr>
+            <a:r>
+              <a:rPr lang="en-US" sz="1050" dirty="0">
+                <a:solidFill>
+                  <a:srgbClr val="9DB0C6"/>
+                </a:solidFill>
+                <a:latin typeface="Malgun Gothic" pitchFamily="34" charset="0"/>
+                <a:ea typeface="Malgun Gothic" pitchFamily="34" charset="-122"/>
+                <a:cs typeface="Malgun Gothic" pitchFamily="34" charset="-120"/>
+              </a:rPr>
+              <a:t>예보는 기상의 기본 기능이므로 여기 있는 것이 맞다.</a:t>
+            </a:r>
+            <a:endParaRPr lang="en-US" sz="1050" dirty="0"/>
+          </a:p>
+        </p:txBody>
+      </p:sp>
+      <p:sp>
+        <p:nvSpPr>
+          <p:cNvPr id="10" name="Shape 8"/>
+          <p:cNvSpPr/>
+          <p:nvPr/>
+        </p:nvSpPr>
+        <p:spPr>
+          <a:xfrm>
+            <a:off x="4315968" y="2057400"/>
+            <a:ext cx="3520440" cy="2057400"/>
+          </a:xfrm>
+          <a:prstGeom prst="roundRect">
+            <a:avLst>
+              <a:gd name="adj" fmla="val 5333"/>
+            </a:avLst>
+          </a:prstGeom>
+          <a:solidFill>
+            <a:srgbClr val="141F33"/>
+          </a:solidFill>
+          <a:ln w="12700">
+            <a:solidFill>
+              <a:srgbClr val="2A3A55"/>
+            </a:solidFill>
+            <a:prstDash val="solid"/>
+          </a:ln>
+        </p:spPr>
+      </p:sp>
+      <p:sp>
+        <p:nvSpPr>
+          <p:cNvPr id="11" name="Shape 9"/>
+          <p:cNvSpPr/>
+          <p:nvPr/>
+        </p:nvSpPr>
+        <p:spPr>
+          <a:xfrm>
+            <a:off x="4590288" y="2286000"/>
+            <a:ext cx="1417320" cy="292608"/>
+          </a:xfrm>
+          <a:prstGeom prst="roundRect">
+            <a:avLst>
+              <a:gd name="adj" fmla="val 50000"/>
+            </a:avLst>
+          </a:prstGeom>
+          <a:solidFill>
+            <a:srgbClr val="7FB7F5"/>
+          </a:solidFill>
+          <a:ln/>
+        </p:spPr>
+      </p:sp>
+      <p:sp>
+        <p:nvSpPr>
+          <p:cNvPr id="12" name="Text 10"/>
+          <p:cNvSpPr txBox="1"/>
+          <p:nvPr/>
+        </p:nvSpPr>
+        <p:spPr>
+          <a:xfrm>
+            <a:off x="4590288" y="2286000"/>
+            <a:ext cx="1417320" cy="292608"/>
+          </a:xfrm>
+          <a:prstGeom prst="rect">
+            <a:avLst/>
+          </a:prstGeom>
+          <a:noFill/>
+          <a:ln/>
+        </p:spPr>
+        <p:txBody>
+          <a:bodyPr wrap="square" lIns="0" tIns="0" rIns="0" bIns="0" rtlCol="0" anchor="ctr"/>
+          <a:lstStyle/>
+          <a:p>
+            <a:pPr algn="ctr" indent="0" marL="0">
+              <a:buNone/>
+            </a:pPr>
+            <a:r>
+              <a:rPr lang="en-US" sz="1100" b="1" dirty="0">
+                <a:solidFill>
+                  <a:srgbClr val="0B1220"/>
+                </a:solidFill>
+                <a:latin typeface="Malgun Gothic" pitchFamily="34" charset="0"/>
+                <a:ea typeface="Malgun Gothic" pitchFamily="34" charset="-122"/>
+                <a:cs typeface="Malgun Gothic" pitchFamily="34" charset="-120"/>
+              </a:rPr>
+              <a:t>v2 · 예측</a:t>
+            </a:r>
+            <a:endParaRPr lang="en-US" sz="1100" dirty="0"/>
+          </a:p>
+        </p:txBody>
+      </p:sp>
+      <p:sp>
+        <p:nvSpPr>
+          <p:cNvPr id="13" name="Text 11"/>
+          <p:cNvSpPr txBox="1"/>
+          <p:nvPr/>
+        </p:nvSpPr>
+        <p:spPr>
+          <a:xfrm>
+            <a:off x="4590288" y="2697480"/>
+            <a:ext cx="3017520" cy="292608"/>
+          </a:xfrm>
+          <a:prstGeom prst="rect">
+            <a:avLst/>
+          </a:prstGeom>
+          <a:noFill/>
+          <a:ln/>
+        </p:spPr>
+        <p:txBody>
+          <a:bodyPr wrap="square" lIns="0" tIns="0" rIns="0" bIns="0" rtlCol="0" anchor="ctr"/>
+          <a:lstStyle/>
+          <a:p>
+            <a:pPr indent="0" marL="0">
+              <a:buNone/>
+            </a:pPr>
+            <a:r>
+              <a:rPr lang="en-US" sz="1350" b="1" dirty="0">
+                <a:solidFill>
+                  <a:srgbClr val="E8EEF6"/>
+                </a:solidFill>
+                <a:latin typeface="Malgun Gothic" pitchFamily="34" charset="0"/>
+                <a:ea typeface="Malgun Gothic" pitchFamily="34" charset="-122"/>
+                <a:cs typeface="Malgun Gothic" pitchFamily="34" charset="-120"/>
+              </a:rPr>
+              <a:t>그 위에서 예측한다</a:t>
+            </a:r>
+            <a:endParaRPr lang="en-US" sz="1350" dirty="0"/>
+          </a:p>
+        </p:txBody>
+      </p:sp>
+      <p:sp>
+        <p:nvSpPr>
+          <p:cNvPr id="14" name="Text 12"/>
+          <p:cNvSpPr txBox="1"/>
+          <p:nvPr/>
+        </p:nvSpPr>
+        <p:spPr>
+          <a:xfrm>
+            <a:off x="4590288" y="3035808"/>
+            <a:ext cx="3017520" cy="960120"/>
+          </a:xfrm>
+          <a:prstGeom prst="rect">
+            <a:avLst/>
+          </a:prstGeom>
+          <a:noFill/>
+          <a:ln/>
+        </p:spPr>
+        <p:txBody>
+          <a:bodyPr wrap="square" lIns="0" tIns="0" rIns="0" bIns="0" rtlCol="0" anchor="ctr"/>
+          <a:lstStyle/>
+          <a:p>
+            <a:pPr indent="0" marL="0">
+              <a:lnSpc>
+                <a:spcPts val="1500"/>
+              </a:lnSpc>
+              <a:buNone/>
+            </a:pPr>
+            <a:r>
+              <a:rPr lang="en-US" sz="1050" dirty="0">
+                <a:solidFill>
+                  <a:srgbClr val="9DB0C6"/>
+                </a:solidFill>
+                <a:latin typeface="Malgun Gothic" pitchFamily="34" charset="0"/>
+                <a:ea typeface="Malgun Gothic" pitchFamily="34" charset="-122"/>
+                <a:cs typeface="Malgun Gothic" pitchFamily="34" charset="-120"/>
+              </a:rPr>
+              <a:t>기본 예보를 넘어 시나리오·앙상블·전망을 만든다.</a:t>
+            </a:r>
+            <a:endParaRPr lang="en-US" sz="1050" dirty="0"/>
+          </a:p>
+          <a:p>
+            <a:pPr indent="0" marL="0">
+              <a:lnSpc>
+                <a:spcPts val="1500"/>
+              </a:lnSpc>
+              <a:buNone/>
+            </a:pPr>
+            <a:r>
+              <a:rPr lang="en-US" sz="1050" dirty="0">
+                <a:solidFill>
+                  <a:srgbClr val="9DB0C6"/>
+                </a:solidFill>
+                <a:latin typeface="Malgun Gothic" pitchFamily="34" charset="0"/>
+                <a:ea typeface="Malgun Gothic" pitchFamily="34" charset="-122"/>
+                <a:cs typeface="Malgun Gothic" pitchFamily="34" charset="-120"/>
+              </a:rPr>
+              <a:t>실황은 예측의 바탕으로 필요해서 갖는다.</a:t>
+            </a:r>
+            <a:endParaRPr lang="en-US" sz="1050" dirty="0"/>
+          </a:p>
+        </p:txBody>
+      </p:sp>
+      <p:sp>
+        <p:nvSpPr>
+          <p:cNvPr id="15" name="Shape 13"/>
+          <p:cNvSpPr/>
+          <p:nvPr/>
+        </p:nvSpPr>
+        <p:spPr>
+          <a:xfrm>
+            <a:off x="8083296" y="2057400"/>
+            <a:ext cx="3520440" cy="2057400"/>
+          </a:xfrm>
+          <a:prstGeom prst="roundRect">
+            <a:avLst>
+              <a:gd name="adj" fmla="val 5333"/>
+            </a:avLst>
+          </a:prstGeom>
+          <a:solidFill>
+            <a:srgbClr val="141F33"/>
+          </a:solidFill>
+          <a:ln w="12700">
+            <a:solidFill>
+              <a:srgbClr val="2A3A55"/>
+            </a:solidFill>
+            <a:prstDash val="solid"/>
+          </a:ln>
+        </p:spPr>
+      </p:sp>
+      <p:sp>
+        <p:nvSpPr>
+          <p:cNvPr id="16" name="Shape 14"/>
+          <p:cNvSpPr/>
+          <p:nvPr/>
+        </p:nvSpPr>
+        <p:spPr>
+          <a:xfrm>
+            <a:off x="8357616" y="2286000"/>
+            <a:ext cx="1417320" cy="292608"/>
+          </a:xfrm>
+          <a:prstGeom prst="roundRect">
+            <a:avLst>
+              <a:gd name="adj" fmla="val 50000"/>
+            </a:avLst>
+          </a:prstGeom>
+          <a:solidFill>
+            <a:srgbClr val="F0A882"/>
+          </a:solidFill>
+          <a:ln/>
+        </p:spPr>
+      </p:sp>
+      <p:sp>
+        <p:nvSpPr>
+          <p:cNvPr id="17" name="Text 15"/>
+          <p:cNvSpPr txBox="1"/>
+          <p:nvPr/>
+        </p:nvSpPr>
+        <p:spPr>
+          <a:xfrm>
+            <a:off x="8357616" y="2286000"/>
+            <a:ext cx="1417320" cy="292608"/>
+          </a:xfrm>
+          <a:prstGeom prst="rect">
+            <a:avLst/>
+          </a:prstGeom>
+          <a:noFill/>
+          <a:ln/>
+        </p:spPr>
+        <p:txBody>
+          <a:bodyPr wrap="square" lIns="0" tIns="0" rIns="0" bIns="0" rtlCol="0" anchor="ctr"/>
+          <a:lstStyle/>
+          <a:p>
+            <a:pPr algn="ctr" indent="0" marL="0">
+              <a:buNone/>
+            </a:pPr>
+            <a:r>
+              <a:rPr lang="en-US" sz="1100" b="1" dirty="0">
+                <a:solidFill>
+                  <a:srgbClr val="0B1220"/>
+                </a:solidFill>
+                <a:latin typeface="Malgun Gothic" pitchFamily="34" charset="0"/>
+                <a:ea typeface="Malgun Gothic" pitchFamily="34" charset="-122"/>
+                <a:cs typeface="Malgun Gothic" pitchFamily="34" charset="-120"/>
+              </a:rPr>
+              <a:t>v3 · 경이</a:t>
+            </a:r>
+            <a:endParaRPr lang="en-US" sz="1100" dirty="0"/>
+          </a:p>
+        </p:txBody>
+      </p:sp>
+      <p:sp>
+        <p:nvSpPr>
+          <p:cNvPr id="18" name="Text 16"/>
+          <p:cNvSpPr txBox="1"/>
+          <p:nvPr/>
+        </p:nvSpPr>
+        <p:spPr>
+          <a:xfrm>
+            <a:off x="8357616" y="2697480"/>
+            <a:ext cx="3017520" cy="292608"/>
+          </a:xfrm>
+          <a:prstGeom prst="rect">
+            <a:avLst/>
+          </a:prstGeom>
+          <a:noFill/>
+          <a:ln/>
+        </p:spPr>
+        <p:txBody>
+          <a:bodyPr wrap="square" lIns="0" tIns="0" rIns="0" bIns="0" rtlCol="0" anchor="ctr"/>
+          <a:lstStyle/>
+          <a:p>
+            <a:pPr indent="0" marL="0">
+              <a:buNone/>
+            </a:pPr>
+            <a:r>
+              <a:rPr lang="en-US" sz="1350" b="1" dirty="0">
+                <a:solidFill>
+                  <a:srgbClr val="E8EEF6"/>
+                </a:solidFill>
+                <a:latin typeface="Malgun Gothic" pitchFamily="34" charset="0"/>
+                <a:ea typeface="Malgun Gothic" pitchFamily="34" charset="-122"/>
+                <a:cs typeface="Malgun Gothic" pitchFamily="34" charset="-120"/>
+              </a:rPr>
+              <a:t>아이가 만난다</a:t>
+            </a:r>
+            <a:endParaRPr lang="en-US" sz="1350" dirty="0"/>
+          </a:p>
+        </p:txBody>
+      </p:sp>
+      <p:sp>
+        <p:nvSpPr>
+          <p:cNvPr id="19" name="Text 17"/>
+          <p:cNvSpPr txBox="1"/>
+          <p:nvPr/>
+        </p:nvSpPr>
+        <p:spPr>
+          <a:xfrm>
+            <a:off x="8357616" y="3035808"/>
+            <a:ext cx="3017520" cy="960120"/>
+          </a:xfrm>
+          <a:prstGeom prst="rect">
+            <a:avLst/>
+          </a:prstGeom>
+          <a:noFill/>
+          <a:ln/>
+        </p:spPr>
+        <p:txBody>
+          <a:bodyPr wrap="square" lIns="0" tIns="0" rIns="0" bIns="0" rtlCol="0" anchor="ctr"/>
+          <a:lstStyle/>
+          <a:p>
+            <a:pPr indent="0" marL="0">
+              <a:lnSpc>
+                <a:spcPts val="1500"/>
+              </a:lnSpc>
+              <a:buNone/>
+            </a:pPr>
+            <a:r>
+              <a:rPr lang="en-US" sz="1050" dirty="0">
+                <a:solidFill>
+                  <a:srgbClr val="9DB0C6"/>
+                </a:solidFill>
+                <a:latin typeface="Malgun Gothic" pitchFamily="34" charset="0"/>
+                <a:ea typeface="Malgun Gothic" pitchFamily="34" charset="-122"/>
+                <a:cs typeface="Malgun Gothic" pitchFamily="34" charset="-120"/>
+              </a:rPr>
+              <a:t>같은 자료를 아이의 말과 그림으로 낸다.</a:t>
+            </a:r>
+            <a:endParaRPr lang="en-US" sz="1050" dirty="0"/>
+          </a:p>
+          <a:p>
+            <a:pPr indent="0" marL="0">
+              <a:lnSpc>
+                <a:spcPts val="1500"/>
+              </a:lnSpc>
+              <a:buNone/>
+            </a:pPr>
+            <a:r>
+              <a:rPr lang="en-US" sz="1050" dirty="0">
+                <a:solidFill>
+                  <a:srgbClr val="9DB0C6"/>
+                </a:solidFill>
+                <a:latin typeface="Malgun Gothic" pitchFamily="34" charset="0"/>
+                <a:ea typeface="Malgun Gothic" pitchFamily="34" charset="-122"/>
+                <a:cs typeface="Malgun Gothic" pitchFamily="34" charset="-120"/>
+              </a:rPr>
+              <a:t>공룡·옛 대륙은 여기서만.</a:t>
+            </a:r>
+            <a:endParaRPr lang="en-US" sz="1050" dirty="0"/>
+          </a:p>
+        </p:txBody>
+      </p:sp>
+      <p:sp>
+        <p:nvSpPr>
+          <p:cNvPr id="20" name="Text 18"/>
+          <p:cNvSpPr txBox="1"/>
+          <p:nvPr/>
+        </p:nvSpPr>
+        <p:spPr>
+          <a:xfrm>
+            <a:off x="566928" y="4297680"/>
+            <a:ext cx="7315200" cy="320040"/>
+          </a:xfrm>
+          <a:prstGeom prst="rect">
+            <a:avLst/>
+          </a:prstGeom>
+          <a:noFill/>
+          <a:ln/>
+        </p:spPr>
+        <p:txBody>
+          <a:bodyPr wrap="square" lIns="0" tIns="0" rIns="0" bIns="0" rtlCol="0" anchor="ctr"/>
+          <a:lstStyle/>
+          <a:p>
+            <a:pPr indent="0" marL="0">
+              <a:buNone/>
+            </a:pPr>
+            <a:r>
+              <a:rPr lang="en-US" sz="1600" b="1" dirty="0">
+                <a:solidFill>
+                  <a:srgbClr val="F0A882"/>
+                </a:solidFill>
+                <a:latin typeface="Malgun Gothic" pitchFamily="34" charset="0"/>
+                <a:ea typeface="Malgun Gothic" pitchFamily="34" charset="-122"/>
+                <a:cs typeface="Malgun Gothic" pitchFamily="34" charset="-120"/>
+              </a:rPr>
+              <a:t>그러면 남는 진짜 문제는 하나</a:t>
+            </a:r>
+            <a:endParaRPr lang="en-US" sz="1600" dirty="0"/>
+          </a:p>
+        </p:txBody>
+      </p:sp>
+      <p:sp>
+        <p:nvSpPr>
+          <p:cNvPr id="21" name="Shape 19"/>
+          <p:cNvSpPr/>
+          <p:nvPr/>
+        </p:nvSpPr>
+        <p:spPr>
+          <a:xfrm>
+            <a:off x="548640" y="4736592"/>
+            <a:ext cx="11091672" cy="1188720"/>
+          </a:xfrm>
+          <a:prstGeom prst="roundRect">
+            <a:avLst>
+              <a:gd name="adj" fmla="val 9231"/>
             </a:avLst>
           </a:prstGeom>
           <a:solidFill>
@@ -5946,667 +6614,141 @@
       </p:sp>
       <p:sp>
         <p:nvSpPr>
-          <p:cNvPr id="5" name="Text 3"/>
-          <p:cNvSpPr txBox="1"/>
-          <p:nvPr/>
-        </p:nvSpPr>
-        <p:spPr>
-          <a:xfrm>
-            <a:off x="868680" y="2148840"/>
-            <a:ext cx="5486400" cy="274320"/>
-          </a:xfrm>
-          <a:prstGeom prst="rect">
-            <a:avLst/>
-          </a:prstGeom>
-          <a:noFill/>
-          <a:ln/>
-        </p:spPr>
-        <p:txBody>
-          <a:bodyPr wrap="square" lIns="0" tIns="0" rIns="0" bIns="0" rtlCol="0" anchor="ctr"/>
-          <a:lstStyle/>
-          <a:p>
-            <a:pPr indent="0" marL="0">
-              <a:buNone/>
-            </a:pPr>
-            <a:r>
-              <a:rPr lang="en-US" sz="1200" b="1" dirty="0">
-                <a:solidFill>
-                  <a:srgbClr val="4A90D9"/>
-                </a:solidFill>
-                <a:latin typeface="Malgun Gothic" pitchFamily="34" charset="0"/>
-                <a:ea typeface="Malgun Gothic" pitchFamily="34" charset="-122"/>
-                <a:cs typeface="Malgun Gothic" pitchFamily="34" charset="-120"/>
-              </a:rPr>
-              <a:t>js/earth-switch.js 가 적어 둔 약속</a:t>
+          <p:cNvPr id="22" name="Text 20"/>
+          <p:cNvSpPr txBox="1"/>
+          <p:nvPr/>
+        </p:nvSpPr>
+        <p:spPr>
+          <a:xfrm>
+            <a:off x="868680" y="4901184"/>
+            <a:ext cx="7315200" cy="292608"/>
+          </a:xfrm>
+          <a:prstGeom prst="rect">
+            <a:avLst/>
+          </a:prstGeom>
+          <a:noFill/>
+          <a:ln/>
+        </p:spPr>
+        <p:txBody>
+          <a:bodyPr wrap="square" lIns="0" tIns="0" rIns="0" bIns="0" rtlCol="0" anchor="ctr"/>
+          <a:lstStyle/>
+          <a:p>
+            <a:pPr indent="0" marL="0">
+              <a:buNone/>
+            </a:pPr>
+            <a:r>
+              <a:rPr lang="en-US" sz="1400" b="1" dirty="0">
+                <a:solidFill>
+                  <a:srgbClr val="E8EEF6"/>
+                </a:solidFill>
+                <a:latin typeface="Malgun Gothic" pitchFamily="34" charset="0"/>
+                <a:ea typeface="Malgun Gothic" pitchFamily="34" charset="-122"/>
+                <a:cs typeface="Malgun Gothic" pitchFamily="34" charset="-120"/>
+              </a:rPr>
+              <a:t>같은 실황을 두 벌로 구현하고 있다</a:t>
+            </a:r>
+            <a:endParaRPr lang="en-US" sz="1400" dirty="0"/>
+          </a:p>
+        </p:txBody>
+      </p:sp>
+      <p:sp>
+        <p:nvSpPr>
+          <p:cNvPr id="23" name="Text 21"/>
+          <p:cNvSpPr txBox="1"/>
+          <p:nvPr/>
+        </p:nvSpPr>
+        <p:spPr>
+          <a:xfrm>
+            <a:off x="868680" y="5230368"/>
+            <a:ext cx="10424160" cy="566928"/>
+          </a:xfrm>
+          <a:prstGeom prst="rect">
+            <a:avLst/>
+          </a:prstGeom>
+          <a:noFill/>
+          <a:ln/>
+        </p:spPr>
+        <p:txBody>
+          <a:bodyPr wrap="square" lIns="0" tIns="0" rIns="0" bIns="0" rtlCol="0" anchor="ctr"/>
+          <a:lstStyle/>
+          <a:p>
+            <a:pPr indent="0" marL="0">
+              <a:lnSpc>
+                <a:spcPts val="1700"/>
+              </a:lnSpc>
+              <a:buNone/>
+            </a:pPr>
+            <a:r>
+              <a:rPr lang="en-US" sz="1150" dirty="0">
+                <a:solidFill>
+                  <a:srgbClr val="9DB0C6"/>
+                </a:solidFill>
+                <a:latin typeface="Malgun Gothic" pitchFamily="34" charset="0"/>
+                <a:ea typeface="Malgun Gothic" pitchFamily="34" charset="-122"/>
+                <a:cs typeface="Malgun Gothic" pitchFamily="34" charset="-120"/>
+              </a:rPr>
+              <a:t>v2 가 실황을 갖는 것은 예측의 바탕이라 맞습니다. 문제는 그 실황이 v1 과 따로 자란 것입니다 —</a:t>
+            </a:r>
+            <a:endParaRPr lang="en-US" sz="1150" dirty="0"/>
+          </a:p>
+          <a:p>
+            <a:pPr indent="0" marL="0">
+              <a:lnSpc>
+                <a:spcPts val="1700"/>
+              </a:lnSpc>
+              <a:buNone/>
+            </a:pPr>
+            <a:r>
+              <a:rPr lang="en-US" sz="1150" dirty="0">
+                <a:solidFill>
+                  <a:srgbClr val="9DB0C6"/>
+                </a:solidFill>
+                <a:latin typeface="Malgun Gothic" pitchFamily="34" charset="0"/>
+                <a:ea typeface="Malgun Gothic" pitchFamily="34" charset="-122"/>
+                <a:cs typeface="Malgun Gothic" pitchFamily="34" charset="-120"/>
+              </a:rPr>
+              <a:t>구름 · 지진 · 바람 · 레이더 · 기입 모형 · 대기질 · 특보가 두 벌의 코드로 서 있습니다.</a:t>
+            </a:r>
+            <a:endParaRPr lang="en-US" sz="1150" dirty="0"/>
+          </a:p>
+        </p:txBody>
+      </p:sp>
+      <p:sp>
+        <p:nvSpPr>
+          <p:cNvPr id="24" name="Text 22"/>
+          <p:cNvSpPr txBox="1"/>
+          <p:nvPr/>
+        </p:nvSpPr>
+        <p:spPr>
+          <a:xfrm>
+            <a:off x="566928" y="6053328"/>
+            <a:ext cx="10972800" cy="292608"/>
+          </a:xfrm>
+          <a:prstGeom prst="rect">
+            <a:avLst/>
+          </a:prstGeom>
+          <a:noFill/>
+          <a:ln/>
+        </p:spPr>
+        <p:txBody>
+          <a:bodyPr wrap="square" lIns="0" tIns="0" rIns="0" bIns="0" rtlCol="0" anchor="ctr"/>
+          <a:lstStyle/>
+          <a:p>
+            <a:pPr indent="0" marL="0">
+              <a:buNone/>
+            </a:pPr>
+            <a:r>
+              <a:rPr lang="en-US" sz="1200" dirty="0">
+                <a:solidFill>
+                  <a:srgbClr val="6B7F99"/>
+                </a:solidFill>
+                <a:latin typeface="Malgun Gothic" pitchFamily="34" charset="0"/>
+                <a:ea typeface="Malgun Gothic" pitchFamily="34" charset="-122"/>
+                <a:cs typeface="Malgun Gothic" pitchFamily="34" charset="-120"/>
+              </a:rPr>
+              <a:t>고칠 것은 «어디에 두느냐» 가 아니라 «몇 벌로 구현하느냐» 입니다.</a:t>
             </a:r>
             <a:endParaRPr lang="en-US" sz="1200" dirty="0"/>
-          </a:p>
-        </p:txBody>
-      </p:sp>
-      <p:sp>
-        <p:nvSpPr>
-          <p:cNvPr id="6" name="Text 4"/>
-          <p:cNvSpPr txBox="1"/>
-          <p:nvPr/>
-        </p:nvSpPr>
-        <p:spPr>
-          <a:xfrm>
-            <a:off x="868680" y="2487168"/>
-            <a:ext cx="3474720" cy="256032"/>
-          </a:xfrm>
-          <a:prstGeom prst="rect">
-            <a:avLst/>
-          </a:prstGeom>
-          <a:noFill/>
-          <a:ln/>
-        </p:spPr>
-        <p:txBody>
-          <a:bodyPr wrap="square" lIns="0" tIns="0" rIns="0" bIns="0" rtlCol="0" anchor="ctr"/>
-          <a:lstStyle/>
-          <a:p>
-            <a:pPr indent="0" marL="0">
-              <a:buNone/>
-            </a:pPr>
-            <a:r>
-              <a:rPr lang="en-US" sz="1300" b="1" dirty="0">
-                <a:solidFill>
-                  <a:srgbClr val="E8EEF6"/>
-                </a:solidFill>
-                <a:latin typeface="Malgun Gothic" pitchFamily="34" charset="0"/>
-                <a:ea typeface="Malgun Gothic" pitchFamily="34" charset="-122"/>
-                <a:cs typeface="Malgun Gothic" pitchFamily="34" charset="-120"/>
-              </a:rPr>
-              <a:t>EARTHUS  ·  현재</a:t>
-            </a:r>
-            <a:endParaRPr lang="en-US" sz="1300" dirty="0"/>
-          </a:p>
-        </p:txBody>
-      </p:sp>
-      <p:sp>
-        <p:nvSpPr>
-          <p:cNvPr id="7" name="Text 5"/>
-          <p:cNvSpPr txBox="1"/>
-          <p:nvPr/>
-        </p:nvSpPr>
-        <p:spPr>
-          <a:xfrm>
-            <a:off x="868680" y="2743200"/>
-            <a:ext cx="3474720" cy="365760"/>
-          </a:xfrm>
-          <a:prstGeom prst="rect">
-            <a:avLst/>
-          </a:prstGeom>
-          <a:noFill/>
-          <a:ln/>
-        </p:spPr>
-        <p:txBody>
-          <a:bodyPr wrap="square" lIns="0" tIns="0" rIns="0" bIns="0" rtlCol="0" anchor="ctr"/>
-          <a:lstStyle/>
-          <a:p>
-            <a:pPr indent="0" marL="0">
-              <a:buNone/>
-            </a:pPr>
-            <a:r>
-              <a:rPr lang="en-US" sz="1100" dirty="0">
-                <a:solidFill>
-                  <a:srgbClr val="9DB0C6"/>
-                </a:solidFill>
-                <a:latin typeface="Malgun Gothic" pitchFamily="34" charset="0"/>
-                <a:ea typeface="Malgun Gothic" pitchFamily="34" charset="-122"/>
-                <a:cs typeface="Malgun Gothic" pitchFamily="34" charset="-120"/>
-              </a:rPr>
-              <a:t>지금 지구에서 무슨 일이</a:t>
-            </a:r>
-            <a:endParaRPr lang="en-US" sz="1100" dirty="0"/>
-          </a:p>
-        </p:txBody>
-      </p:sp>
-      <p:sp>
-        <p:nvSpPr>
-          <p:cNvPr id="8" name="Text 6"/>
-          <p:cNvSpPr txBox="1"/>
-          <p:nvPr/>
-        </p:nvSpPr>
-        <p:spPr>
-          <a:xfrm>
-            <a:off x="4526280" y="2487168"/>
-            <a:ext cx="3474720" cy="256032"/>
-          </a:xfrm>
-          <a:prstGeom prst="rect">
-            <a:avLst/>
-          </a:prstGeom>
-          <a:noFill/>
-          <a:ln/>
-        </p:spPr>
-        <p:txBody>
-          <a:bodyPr wrap="square" lIns="0" tIns="0" rIns="0" bIns="0" rtlCol="0" anchor="ctr"/>
-          <a:lstStyle/>
-          <a:p>
-            <a:pPr indent="0" marL="0">
-              <a:buNone/>
-            </a:pPr>
-            <a:r>
-              <a:rPr lang="en-US" sz="1300" b="1" dirty="0">
-                <a:solidFill>
-                  <a:srgbClr val="E8EEF6"/>
-                </a:solidFill>
-                <a:latin typeface="Malgun Gothic" pitchFamily="34" charset="0"/>
-                <a:ea typeface="Malgun Gothic" pitchFamily="34" charset="-122"/>
-                <a:cs typeface="Malgun Gothic" pitchFamily="34" charset="-120"/>
-              </a:rPr>
-              <a:t>Intelligence  ·  미래</a:t>
-            </a:r>
-            <a:endParaRPr lang="en-US" sz="1300" dirty="0"/>
-          </a:p>
-        </p:txBody>
-      </p:sp>
-      <p:sp>
-        <p:nvSpPr>
-          <p:cNvPr id="9" name="Text 7"/>
-          <p:cNvSpPr txBox="1"/>
-          <p:nvPr/>
-        </p:nvSpPr>
-        <p:spPr>
-          <a:xfrm>
-            <a:off x="4526280" y="2743200"/>
-            <a:ext cx="3474720" cy="365760"/>
-          </a:xfrm>
-          <a:prstGeom prst="rect">
-            <a:avLst/>
-          </a:prstGeom>
-          <a:noFill/>
-          <a:ln/>
-        </p:spPr>
-        <p:txBody>
-          <a:bodyPr wrap="square" lIns="0" tIns="0" rIns="0" bIns="0" rtlCol="0" anchor="ctr"/>
-          <a:lstStyle/>
-          <a:p>
-            <a:pPr indent="0" marL="0">
-              <a:buNone/>
-            </a:pPr>
-            <a:r>
-              <a:rPr lang="en-US" sz="1100" dirty="0">
-                <a:solidFill>
-                  <a:srgbClr val="9DB0C6"/>
-                </a:solidFill>
-                <a:latin typeface="Malgun Gothic" pitchFamily="34" charset="0"/>
-                <a:ea typeface="Malgun Gothic" pitchFamily="34" charset="-122"/>
-                <a:cs typeface="Malgun Gothic" pitchFamily="34" charset="-120"/>
-              </a:rPr>
-              <a:t>앞으로 무슨 일이 — 예보와 시나리오</a:t>
-            </a:r>
-            <a:endParaRPr lang="en-US" sz="1100" dirty="0"/>
-          </a:p>
-        </p:txBody>
-      </p:sp>
-      <p:sp>
-        <p:nvSpPr>
-          <p:cNvPr id="10" name="Text 8"/>
-          <p:cNvSpPr txBox="1"/>
-          <p:nvPr/>
-        </p:nvSpPr>
-        <p:spPr>
-          <a:xfrm>
-            <a:off x="8183880" y="2487168"/>
-            <a:ext cx="3474720" cy="256032"/>
-          </a:xfrm>
-          <a:prstGeom prst="rect">
-            <a:avLst/>
-          </a:prstGeom>
-          <a:noFill/>
-          <a:ln/>
-        </p:spPr>
-        <p:txBody>
-          <a:bodyPr wrap="square" lIns="0" tIns="0" rIns="0" bIns="0" rtlCol="0" anchor="ctr"/>
-          <a:lstStyle/>
-          <a:p>
-            <a:pPr indent="0" marL="0">
-              <a:buNone/>
-            </a:pPr>
-            <a:r>
-              <a:rPr lang="en-US" sz="1300" b="1" dirty="0">
-                <a:solidFill>
-                  <a:srgbClr val="E8EEF6"/>
-                </a:solidFill>
-                <a:latin typeface="Malgun Gothic" pitchFamily="34" charset="0"/>
-                <a:ea typeface="Malgun Gothic" pitchFamily="34" charset="-122"/>
-                <a:cs typeface="Malgun Gothic" pitchFamily="34" charset="-120"/>
-              </a:rPr>
-              <a:t>WONDER  ·  과거</a:t>
-            </a:r>
-            <a:endParaRPr lang="en-US" sz="1300" dirty="0"/>
-          </a:p>
-        </p:txBody>
-      </p:sp>
-      <p:sp>
-        <p:nvSpPr>
-          <p:cNvPr id="11" name="Text 9"/>
-          <p:cNvSpPr txBox="1"/>
-          <p:nvPr/>
-        </p:nvSpPr>
-        <p:spPr>
-          <a:xfrm>
-            <a:off x="8183880" y="2743200"/>
-            <a:ext cx="3474720" cy="365760"/>
-          </a:xfrm>
-          <a:prstGeom prst="rect">
-            <a:avLst/>
-          </a:prstGeom>
-          <a:noFill/>
-          <a:ln/>
-        </p:spPr>
-        <p:txBody>
-          <a:bodyPr wrap="square" lIns="0" tIns="0" rIns="0" bIns="0" rtlCol="0" anchor="ctr"/>
-          <a:lstStyle/>
-          <a:p>
-            <a:pPr indent="0" marL="0">
-              <a:buNone/>
-            </a:pPr>
-            <a:r>
-              <a:rPr lang="en-US" sz="1100" dirty="0">
-                <a:solidFill>
-                  <a:srgbClr val="9DB0C6"/>
-                </a:solidFill>
-                <a:latin typeface="Malgun Gothic" pitchFamily="34" charset="0"/>
-                <a:ea typeface="Malgun Gothic" pitchFamily="34" charset="-122"/>
-                <a:cs typeface="Malgun Gothic" pitchFamily="34" charset="-120"/>
-              </a:rPr>
-              <a:t>여기까지 어떻게 왔나</a:t>
-            </a:r>
-            <a:endParaRPr lang="en-US" sz="1100" dirty="0"/>
-          </a:p>
-        </p:txBody>
-      </p:sp>
-      <p:sp>
-        <p:nvSpPr>
-          <p:cNvPr id="12" name="Text 10"/>
-          <p:cNvSpPr txBox="1"/>
-          <p:nvPr/>
-        </p:nvSpPr>
-        <p:spPr>
-          <a:xfrm>
-            <a:off x="566928" y="3611880"/>
-            <a:ext cx="5486400" cy="320040"/>
-          </a:xfrm>
-          <a:prstGeom prst="rect">
-            <a:avLst/>
-          </a:prstGeom>
-          <a:noFill/>
-          <a:ln/>
-        </p:spPr>
-        <p:txBody>
-          <a:bodyPr wrap="square" lIns="0" tIns="0" rIns="0" bIns="0" rtlCol="0" anchor="ctr"/>
-          <a:lstStyle/>
-          <a:p>
-            <a:pPr indent="0" marL="0">
-              <a:buNone/>
-            </a:pPr>
-            <a:r>
-              <a:rPr lang="en-US" sz="1600" b="1" dirty="0">
-                <a:solidFill>
-                  <a:srgbClr val="F0A882"/>
-                </a:solidFill>
-                <a:latin typeface="Malgun Gothic" pitchFamily="34" charset="0"/>
-                <a:ea typeface="Malgun Gothic" pitchFamily="34" charset="-122"/>
-                <a:cs typeface="Malgun Gothic" pitchFamily="34" charset="-120"/>
-              </a:rPr>
-              <a:t>그런데 실제로는</a:t>
-            </a:r>
-            <a:endParaRPr lang="en-US" sz="1600" dirty="0"/>
-          </a:p>
-        </p:txBody>
-      </p:sp>
-      <p:sp>
-        <p:nvSpPr>
-          <p:cNvPr id="13" name="Shape 11"/>
-          <p:cNvSpPr/>
-          <p:nvPr/>
-        </p:nvSpPr>
-        <p:spPr>
-          <a:xfrm>
-            <a:off x="548640" y="4041648"/>
-            <a:ext cx="11091672" cy="548640"/>
-          </a:xfrm>
-          <a:prstGeom prst="roundRect">
-            <a:avLst>
-              <a:gd name="adj" fmla="val 20000"/>
-            </a:avLst>
-          </a:prstGeom>
-          <a:solidFill>
-            <a:srgbClr val="141F33"/>
-          </a:solidFill>
-          <a:ln w="12700">
-            <a:solidFill>
-              <a:srgbClr val="2A3A55"/>
-            </a:solidFill>
-            <a:prstDash val="solid"/>
-          </a:ln>
-        </p:spPr>
-      </p:sp>
-      <p:sp>
-        <p:nvSpPr>
-          <p:cNvPr id="14" name="Text 12"/>
-          <p:cNvSpPr txBox="1"/>
-          <p:nvPr/>
-        </p:nvSpPr>
-        <p:spPr>
-          <a:xfrm>
-            <a:off x="868680" y="4160520"/>
-            <a:ext cx="3931920" cy="310896"/>
-          </a:xfrm>
-          <a:prstGeom prst="rect">
-            <a:avLst/>
-          </a:prstGeom>
-          <a:noFill/>
-          <a:ln/>
-        </p:spPr>
-        <p:txBody>
-          <a:bodyPr wrap="square" lIns="0" tIns="0" rIns="0" bIns="0" rtlCol="0" anchor="ctr"/>
-          <a:lstStyle/>
-          <a:p>
-            <a:pPr indent="0" marL="0">
-              <a:buNone/>
-            </a:pPr>
-            <a:r>
-              <a:rPr lang="en-US" sz="1300" b="1" dirty="0">
-                <a:solidFill>
-                  <a:srgbClr val="E8EEF6"/>
-                </a:solidFill>
-                <a:latin typeface="Malgun Gothic" pitchFamily="34" charset="0"/>
-                <a:ea typeface="Malgun Gothic" pitchFamily="34" charset="-122"/>
-                <a:cs typeface="Malgun Gothic" pitchFamily="34" charset="-120"/>
-              </a:rPr>
-              <a:t>«미래» 인 v2 에 실황이 잔뜩</a:t>
-            </a:r>
-            <a:endParaRPr lang="en-US" sz="1300" dirty="0"/>
-          </a:p>
-        </p:txBody>
-      </p:sp>
-      <p:sp>
-        <p:nvSpPr>
-          <p:cNvPr id="15" name="Text 13"/>
-          <p:cNvSpPr txBox="1"/>
-          <p:nvPr/>
-        </p:nvSpPr>
-        <p:spPr>
-          <a:xfrm>
-            <a:off x="4892040" y="4160520"/>
-            <a:ext cx="6492240" cy="310896"/>
-          </a:xfrm>
-          <a:prstGeom prst="rect">
-            <a:avLst/>
-          </a:prstGeom>
-          <a:noFill/>
-          <a:ln/>
-        </p:spPr>
-        <p:txBody>
-          <a:bodyPr wrap="square" lIns="0" tIns="0" rIns="0" bIns="0" rtlCol="0" anchor="ctr"/>
-          <a:lstStyle/>
-          <a:p>
-            <a:pPr indent="0" marL="0">
-              <a:buNone/>
-            </a:pPr>
-            <a:r>
-              <a:rPr lang="en-US" sz="1150" dirty="0">
-                <a:solidFill>
-                  <a:srgbClr val="9DB0C6"/>
-                </a:solidFill>
-                <a:latin typeface="Malgun Gothic" pitchFamily="34" charset="0"/>
-                <a:ea typeface="Malgun Gothic" pitchFamily="34" charset="-122"/>
-                <a:cs typeface="Malgun Gothic" pitchFamily="34" charset="-120"/>
-              </a:rPr>
-              <a:t>구름 실황 · 지진 실황 · 바람 관측 3천 개소 · 레이더 강수 · 기입 모형</a:t>
-            </a:r>
-            <a:endParaRPr lang="en-US" sz="1150" dirty="0"/>
-          </a:p>
-        </p:txBody>
-      </p:sp>
-      <p:sp>
-        <p:nvSpPr>
-          <p:cNvPr id="16" name="Shape 14"/>
-          <p:cNvSpPr/>
-          <p:nvPr/>
-        </p:nvSpPr>
-        <p:spPr>
-          <a:xfrm>
-            <a:off x="548640" y="4700016"/>
-            <a:ext cx="11091672" cy="548640"/>
-          </a:xfrm>
-          <a:prstGeom prst="roundRect">
-            <a:avLst>
-              <a:gd name="adj" fmla="val 20000"/>
-            </a:avLst>
-          </a:prstGeom>
-          <a:solidFill>
-            <a:srgbClr val="141F33"/>
-          </a:solidFill>
-          <a:ln w="12700">
-            <a:solidFill>
-              <a:srgbClr val="2A3A55"/>
-            </a:solidFill>
-            <a:prstDash val="solid"/>
-          </a:ln>
-        </p:spPr>
-      </p:sp>
-      <p:sp>
-        <p:nvSpPr>
-          <p:cNvPr id="17" name="Text 15"/>
-          <p:cNvSpPr txBox="1"/>
-          <p:nvPr/>
-        </p:nvSpPr>
-        <p:spPr>
-          <a:xfrm>
-            <a:off x="868680" y="4818888"/>
-            <a:ext cx="3931920" cy="310896"/>
-          </a:xfrm>
-          <a:prstGeom prst="rect">
-            <a:avLst/>
-          </a:prstGeom>
-          <a:noFill/>
-          <a:ln/>
-        </p:spPr>
-        <p:txBody>
-          <a:bodyPr wrap="square" lIns="0" tIns="0" rIns="0" bIns="0" rtlCol="0" anchor="ctr"/>
-          <a:lstStyle/>
-          <a:p>
-            <a:pPr indent="0" marL="0">
-              <a:buNone/>
-            </a:pPr>
-            <a:r>
-              <a:rPr lang="en-US" sz="1300" b="1" dirty="0">
-                <a:solidFill>
-                  <a:srgbClr val="E8EEF6"/>
-                </a:solidFill>
-                <a:latin typeface="Malgun Gothic" pitchFamily="34" charset="0"/>
-                <a:ea typeface="Malgun Gothic" pitchFamily="34" charset="-122"/>
-                <a:cs typeface="Malgun Gothic" pitchFamily="34" charset="-120"/>
-              </a:rPr>
-              <a:t>«현재» 인 v1 에 예보가 있다</a:t>
-            </a:r>
-            <a:endParaRPr lang="en-US" sz="1300" dirty="0"/>
-          </a:p>
-        </p:txBody>
-      </p:sp>
-      <p:sp>
-        <p:nvSpPr>
-          <p:cNvPr id="18" name="Text 16"/>
-          <p:cNvSpPr txBox="1"/>
-          <p:nvPr/>
-        </p:nvSpPr>
-        <p:spPr>
-          <a:xfrm>
-            <a:off x="4892040" y="4818888"/>
-            <a:ext cx="6492240" cy="310896"/>
-          </a:xfrm>
-          <a:prstGeom prst="rect">
-            <a:avLst/>
-          </a:prstGeom>
-          <a:noFill/>
-          <a:ln/>
-        </p:spPr>
-        <p:txBody>
-          <a:bodyPr wrap="square" lIns="0" tIns="0" rIns="0" bIns="0" rtlCol="0" anchor="ctr"/>
-          <a:lstStyle/>
-          <a:p>
-            <a:pPr indent="0" marL="0">
-              <a:buNone/>
-            </a:pPr>
-            <a:r>
-              <a:rPr lang="en-US" sz="1150" dirty="0">
-                <a:solidFill>
-                  <a:srgbClr val="9DB0C6"/>
-                </a:solidFill>
-                <a:latin typeface="Malgun Gothic" pitchFamily="34" charset="0"/>
-                <a:ea typeface="Malgun Gothic" pitchFamily="34" charset="-122"/>
-                <a:cs typeface="Malgun Gothic" pitchFamily="34" charset="-120"/>
-              </a:rPr>
-              <a:t>예보 바람 · 최고/최저기온 · 영국 예보</a:t>
-            </a:r>
-            <a:endParaRPr lang="en-US" sz="1150" dirty="0"/>
-          </a:p>
-        </p:txBody>
-      </p:sp>
-      <p:sp>
-        <p:nvSpPr>
-          <p:cNvPr id="19" name="Shape 17"/>
-          <p:cNvSpPr/>
-          <p:nvPr/>
-        </p:nvSpPr>
-        <p:spPr>
-          <a:xfrm>
-            <a:off x="548640" y="5358384"/>
-            <a:ext cx="11091672" cy="548640"/>
-          </a:xfrm>
-          <a:prstGeom prst="roundRect">
-            <a:avLst>
-              <a:gd name="adj" fmla="val 20000"/>
-            </a:avLst>
-          </a:prstGeom>
-          <a:solidFill>
-            <a:srgbClr val="141F33"/>
-          </a:solidFill>
-          <a:ln w="12700">
-            <a:solidFill>
-              <a:srgbClr val="2A3A55"/>
-            </a:solidFill>
-            <a:prstDash val="solid"/>
-          </a:ln>
-        </p:spPr>
-      </p:sp>
-      <p:sp>
-        <p:nvSpPr>
-          <p:cNvPr id="20" name="Text 18"/>
-          <p:cNvSpPr txBox="1"/>
-          <p:nvPr/>
-        </p:nvSpPr>
-        <p:spPr>
-          <a:xfrm>
-            <a:off x="868680" y="5477256"/>
-            <a:ext cx="3931920" cy="310896"/>
-          </a:xfrm>
-          <a:prstGeom prst="rect">
-            <a:avLst/>
-          </a:prstGeom>
-          <a:noFill/>
-          <a:ln/>
-        </p:spPr>
-        <p:txBody>
-          <a:bodyPr wrap="square" lIns="0" tIns="0" rIns="0" bIns="0" rtlCol="0" anchor="ctr"/>
-          <a:lstStyle/>
-          <a:p>
-            <a:pPr indent="0" marL="0">
-              <a:buNone/>
-            </a:pPr>
-            <a:r>
-              <a:rPr lang="en-US" sz="1300" b="1" dirty="0">
-                <a:solidFill>
-                  <a:srgbClr val="E8EEF6"/>
-                </a:solidFill>
-                <a:latin typeface="Malgun Gothic" pitchFamily="34" charset="0"/>
-                <a:ea typeface="Malgun Gothic" pitchFamily="34" charset="-122"/>
-                <a:cs typeface="Malgun Gothic" pitchFamily="34" charset="-120"/>
-              </a:rPr>
-              <a:t>«과거» 인 v3 에 현재가 대부분</a:t>
-            </a:r>
-            <a:endParaRPr lang="en-US" sz="1300" dirty="0"/>
-          </a:p>
-        </p:txBody>
-      </p:sp>
-      <p:sp>
-        <p:nvSpPr>
-          <p:cNvPr id="21" name="Text 19"/>
-          <p:cNvSpPr txBox="1"/>
-          <p:nvPr/>
-        </p:nvSpPr>
-        <p:spPr>
-          <a:xfrm>
-            <a:off x="4892040" y="5477256"/>
-            <a:ext cx="6492240" cy="310896"/>
-          </a:xfrm>
-          <a:prstGeom prst="rect">
-            <a:avLst/>
-          </a:prstGeom>
-          <a:noFill/>
-          <a:ln/>
-        </p:spPr>
-        <p:txBody>
-          <a:bodyPr wrap="square" lIns="0" tIns="0" rIns="0" bIns="0" rtlCol="0" anchor="ctr"/>
-          <a:lstStyle/>
-          <a:p>
-            <a:pPr indent="0" marL="0">
-              <a:buNone/>
-            </a:pPr>
-            <a:r>
-              <a:rPr lang="en-US" sz="1150" dirty="0">
-                <a:solidFill>
-                  <a:srgbClr val="9DB0C6"/>
-                </a:solidFill>
-                <a:latin typeface="Malgun Gothic" pitchFamily="34" charset="0"/>
-                <a:ea typeface="Malgun Gothic" pitchFamily="34" charset="-122"/>
-                <a:cs typeface="Malgun Gothic" pitchFamily="34" charset="-120"/>
-              </a:rPr>
-              <a:t>12개 중 공룡·판게아·충돌구 3개만 과거, 나머지는 지금 날씨</a:t>
-            </a:r>
-            <a:endParaRPr lang="en-US" sz="1150" dirty="0"/>
-          </a:p>
-        </p:txBody>
-      </p:sp>
-      <p:sp>
-        <p:nvSpPr>
-          <p:cNvPr id="22" name="Text 20"/>
-          <p:cNvSpPr txBox="1"/>
-          <p:nvPr/>
-        </p:nvSpPr>
-        <p:spPr>
-          <a:xfrm>
-            <a:off x="566928" y="6144768"/>
-            <a:ext cx="10972800" cy="292608"/>
-          </a:xfrm>
-          <a:prstGeom prst="rect">
-            <a:avLst/>
-          </a:prstGeom>
-          <a:noFill/>
-          <a:ln/>
-        </p:spPr>
-        <p:txBody>
-          <a:bodyPr wrap="square" lIns="0" tIns="0" rIns="0" bIns="0" rtlCol="0" anchor="ctr"/>
-          <a:lstStyle/>
-          <a:p>
-            <a:pPr indent="0" marL="0">
-              <a:buNone/>
-            </a:pPr>
-            <a:r>
-              <a:rPr lang="en-US" sz="1250" dirty="0">
-                <a:solidFill>
-                  <a:srgbClr val="6B7F99"/>
-                </a:solidFill>
-                <a:latin typeface="Malgun Gothic" pitchFamily="34" charset="0"/>
-                <a:ea typeface="Malgun Gothic" pitchFamily="34" charset="-122"/>
-                <a:cs typeface="Malgun Gothic" pitchFamily="34" charset="-120"/>
-              </a:rPr>
-              <a:t>사용자는 «어디에 뭐가 있는지» 를 축이 아니라 기억으로 찾고 있습니다.</a:t>
-            </a:r>
-            <a:endParaRPr lang="en-US" sz="1250" dirty="0"/>
           </a:p>
         </p:txBody>
       </p:sp>
@@ -7853,7 +7995,7 @@
                 <a:ea typeface="Malgun Gothic" pitchFamily="34" charset="-122"/>
                 <a:cs typeface="Malgun Gothic" pitchFamily="34" charset="-120"/>
               </a:rPr>
-              <a:t>v1 · 지금</a:t>
+              <a:t>v1 · 기본</a:t>
             </a:r>
             <a:endParaRPr lang="en-US" sz="1150" dirty="0"/>
           </a:p>
@@ -7938,7 +8080,7 @@
                 <a:ea typeface="Malgun Gothic" pitchFamily="34" charset="-122"/>
                 <a:cs typeface="Malgun Gothic" pitchFamily="34" charset="-120"/>
               </a:rPr>
-              <a:t>질문에 바로 답한다</a:t>
+              <a:t>공공데이터를 그대로</a:t>
             </a:r>
             <a:endParaRPr lang="en-US" sz="1250" dirty="0"/>
           </a:p>
@@ -7962,7 +8104,7 @@
                 <a:ea typeface="Malgun Gothic" pitchFamily="34" charset="-122"/>
                 <a:cs typeface="Malgun Gothic" pitchFamily="34" charset="-120"/>
               </a:rPr>
-              <a:t>숫자와 경보가 먼저</a:t>
+              <a:t>숫자·경보·예보가 먼저</a:t>
             </a:r>
             <a:endParaRPr lang="en-US" sz="1250" dirty="0"/>
           </a:p>
@@ -7986,7 +8128,7 @@
                 <a:ea typeface="Malgun Gothic" pitchFamily="34" charset="-122"/>
                 <a:cs typeface="Malgun Gothic" pitchFamily="34" charset="-120"/>
               </a:rPr>
-              <a:t>한 화면에 결론</a:t>
+              <a:t>출처와 검증을 함께 낸다</a:t>
             </a:r>
             <a:endParaRPr lang="en-US" sz="1250" dirty="0"/>
           </a:p>
@@ -8074,7 +8216,7 @@
                 <a:ea typeface="Malgun Gothic" pitchFamily="34" charset="-122"/>
                 <a:cs typeface="Malgun Gothic" pitchFamily="34" charset="-120"/>
               </a:rPr>
-              <a:t>v2 · 깊이</a:t>
+              <a:t>v2 · 예측</a:t>
             </a:r>
             <a:endParaRPr lang="en-US" sz="1150" dirty="0"/>
           </a:p>
@@ -8113,7 +8255,7 @@
                 <a:ea typeface="Malgun Gothic" pitchFamily="34" charset="-122"/>
                 <a:cs typeface="Malgun Gothic" pitchFamily="34" charset="-120"/>
               </a:rPr>
-              <a:t>읽는 사람: 왜인지 알고 싶은 사람</a:t>
+              <a:t>읽는 사람: 앞을 알고 싶은 사람</a:t>
             </a:r>
             <a:endParaRPr lang="en-US" sz="1100" dirty="0"/>
           </a:p>
@@ -8159,7 +8301,7 @@
                 <a:ea typeface="Malgun Gothic" pitchFamily="34" charset="-122"/>
                 <a:cs typeface="Malgun Gothic" pitchFamily="34" charset="-120"/>
               </a:rPr>
-              <a:t>시간축과 근거가 먼저</a:t>
+              <a:t>기본 예보를 넘어선다</a:t>
             </a:r>
             <a:endParaRPr lang="en-US" sz="1250" dirty="0"/>
           </a:p>
@@ -8183,7 +8325,7 @@
                 <a:ea typeface="Malgun Gothic" pitchFamily="34" charset="-122"/>
                 <a:cs typeface="Malgun Gothic" pitchFamily="34" charset="-120"/>
               </a:rPr>
-              <a:t>진리등급을 항상 표기</a:t>
+              <a:t>시나리오·앙상블·전망</a:t>
             </a:r>
             <a:endParaRPr lang="en-US" sz="1250" dirty="0"/>
           </a:p>
@@ -8207,7 +8349,7 @@
                 <a:ea typeface="Malgun Gothic" pitchFamily="34" charset="-122"/>
                 <a:cs typeface="Malgun Gothic" pitchFamily="34" charset="-120"/>
               </a:rPr>
-              <a:t>층을 겹쳐 스스로 판단</a:t>
+              <a:t>진리등급으로 갈라 보여준다</a:t>
             </a:r>
             <a:endParaRPr lang="en-US" sz="1250" dirty="0"/>
           </a:p>
@@ -8707,7 +8849,7 @@
                 <a:ea typeface="Malgun Gothic" pitchFamily="34" charset="-122"/>
                 <a:cs typeface="Malgun Gothic" pitchFamily="34" charset="-120"/>
               </a:rPr>
-              <a:t>v1 · 지금</a:t>
+              <a:t>v1 · 기본</a:t>
             </a:r>
             <a:endParaRPr lang="en-US" sz="1100" dirty="0"/>
           </a:p>
@@ -8824,7 +8966,7 @@
                 <a:ea typeface="Malgun Gothic" pitchFamily="34" charset="-122"/>
                 <a:cs typeface="Malgun Gothic" pitchFamily="34" charset="-120"/>
               </a:rPr>
-              <a:t>안전</a:t>
+              <a:t>예보</a:t>
             </a:r>
             <a:endParaRPr lang="en-US" sz="1150" dirty="0"/>
           </a:p>
@@ -8863,7 +9005,7 @@
                 <a:ea typeface="Malgun Gothic" pitchFamily="34" charset="-122"/>
                 <a:cs typeface="Malgun Gothic" pitchFamily="34" charset="-120"/>
               </a:rPr>
-              <a:t>태풍 · 지진 · 산불 · 쓰나미</a:t>
+              <a:t>기온 · 바람 · 강수 (기본 기능)</a:t>
             </a:r>
             <a:endParaRPr lang="en-US" sz="1100" dirty="0"/>
           </a:p>
@@ -8902,7 +9044,7 @@
                 <a:ea typeface="Malgun Gothic" pitchFamily="34" charset="-122"/>
                 <a:cs typeface="Malgun Gothic" pitchFamily="34" charset="-120"/>
               </a:rPr>
-              <a:t>내 주변</a:t>
+              <a:t>안전</a:t>
             </a:r>
             <a:endParaRPr lang="en-US" sz="1150" dirty="0"/>
           </a:p>
@@ -8941,7 +9083,7 @@
                 <a:ea typeface="Malgun Gothic" pitchFamily="34" charset="-122"/>
                 <a:cs typeface="Malgun Gothic" pitchFamily="34" charset="-120"/>
               </a:rPr>
-              <a:t>관측소 · 부이 · 내 위치</a:t>
+              <a:t>태풍 · 지진 · 산불 · 쓰나미</a:t>
             </a:r>
             <a:endParaRPr lang="en-US" sz="1100" dirty="0"/>
           </a:p>
@@ -8980,7 +9122,7 @@
                 <a:ea typeface="Malgun Gothic" pitchFamily="34" charset="-122"/>
                 <a:cs typeface="Malgun Gothic" pitchFamily="34" charset="-120"/>
               </a:rPr>
-              <a:t>이동</a:t>
+              <a:t>보고서</a:t>
             </a:r>
             <a:endParaRPr lang="en-US" sz="1150" dirty="0"/>
           </a:p>
@@ -9019,7 +9161,7 @@
                 <a:ea typeface="Malgun Gothic" pitchFamily="34" charset="-122"/>
                 <a:cs typeface="Malgun Gothic" pitchFamily="34" charset="-120"/>
               </a:rPr>
-              <a:t>항공편 · 선박</a:t>
+              <a:t>LAB 분석 · 태풍 결과 · 예보 검증</a:t>
             </a:r>
             <a:endParaRPr lang="en-US" sz="1100" dirty="0"/>
           </a:p>
@@ -9185,7 +9327,7 @@
                 <a:ea typeface="Malgun Gothic" pitchFamily="34" charset="-122"/>
                 <a:cs typeface="Malgun Gothic" pitchFamily="34" charset="-120"/>
               </a:rPr>
-              <a:t>v2 · 깊이</a:t>
+              <a:t>v2 · 예측</a:t>
             </a:r>
             <a:endParaRPr lang="en-US" sz="1100" dirty="0"/>
           </a:p>
@@ -9224,7 +9366,7 @@
                 <a:ea typeface="Malgun Gothic" pitchFamily="34" charset="-122"/>
                 <a:cs typeface="Malgun Gothic" pitchFamily="34" charset="-120"/>
               </a:rPr>
-              <a:t>시간</a:t>
+              <a:t>예측</a:t>
             </a:r>
             <a:endParaRPr lang="en-US" sz="1150" dirty="0"/>
           </a:p>
@@ -9263,7 +9405,7 @@
                 <a:ea typeface="Malgun Gothic" pitchFamily="34" charset="-122"/>
                 <a:cs typeface="Malgun Gothic" pitchFamily="34" charset="-120"/>
               </a:rPr>
-              <a:t>5일 예보 · 산림감소 · 지진 25년</a:t>
+              <a:t>5일 재생 · 앙상블 · 시나리오</a:t>
             </a:r>
             <a:endParaRPr lang="en-US" sz="1100" dirty="0"/>
           </a:p>
@@ -9302,7 +9444,7 @@
                 <a:ea typeface="Malgun Gothic" pitchFamily="34" charset="-122"/>
                 <a:cs typeface="Malgun Gothic" pitchFamily="34" charset="-120"/>
               </a:rPr>
-              <a:t>땅과 바다</a:t>
+              <a:t>전망</a:t>
             </a:r>
             <a:endParaRPr lang="en-US" sz="1150" dirty="0"/>
           </a:p>
@@ -9341,7 +9483,7 @@
                 <a:ea typeface="Malgun Gothic" pitchFamily="34" charset="-122"/>
                 <a:cs typeface="Malgun Gothic" pitchFamily="34" charset="-120"/>
               </a:rPr>
-              <a:t>3D 지형 · 해저 · 해수면 전망</a:t>
+              <a:t>2100 해수면 · 산림감소 · 지진 25년</a:t>
             </a:r>
             <a:endParaRPr lang="en-US" sz="1100" dirty="0"/>
           </a:p>
@@ -9380,7 +9522,7 @@
                 <a:ea typeface="Malgun Gothic" pitchFamily="34" charset="-122"/>
                 <a:cs typeface="Malgun Gothic" pitchFamily="34" charset="-120"/>
               </a:rPr>
-              <a:t>사람</a:t>
+              <a:t>땅과 바다</a:t>
             </a:r>
             <a:endParaRPr lang="en-US" sz="1150" dirty="0"/>
           </a:p>
@@ -9419,7 +9561,7 @@
                 <a:ea typeface="Malgun Gothic" pitchFamily="34" charset="-122"/>
                 <a:cs typeface="Malgun Gothic" pitchFamily="34" charset="-120"/>
               </a:rPr>
-              <a:t>실시간 인구 · 도시 타워</a:t>
+              <a:t>3D 지형 · 해저 · 연안 침수</a:t>
             </a:r>
             <a:endParaRPr lang="en-US" sz="1100" dirty="0"/>
           </a:p>
@@ -9458,7 +9600,7 @@
                 <a:ea typeface="Malgun Gothic" pitchFamily="34" charset="-122"/>
                 <a:cs typeface="Malgun Gothic" pitchFamily="34" charset="-120"/>
               </a:rPr>
-              <a:t>우주</a:t>
+              <a:t>사람</a:t>
             </a:r>
             <a:endParaRPr lang="en-US" sz="1150" dirty="0"/>
           </a:p>
@@ -9497,7 +9639,7 @@
                 <a:ea typeface="Malgun Gothic" pitchFamily="34" charset="-122"/>
                 <a:cs typeface="Malgun Gothic" pitchFamily="34" charset="-120"/>
               </a:rPr>
-              <a:t>위성 · 태양 · 은하</a:t>
+              <a:t>실시간 인구 · 도시 타워</a:t>
             </a:r>
             <a:endParaRPr lang="en-US" sz="1100" dirty="0"/>
           </a:p>
